--- a/output/pptx/template_template_pitch_short.pptx
+++ b/output/pptx/template_template_pitch_short.pptx
@@ -6037,7 +6037,7 @@
               </a:defRPr>
             </a:pPr>
             <a:r>
-              <a:t>•  This deck's own DOI: not yet reserved — no Zenodo deposit on file for this deck.</a:t>
+              <a:t>•  This deck's own DOI: 10.5281/zenodo.21281509.</a:t>
             </a:r>
           </a:p>
           <a:p>

--- a/output/pptx/template_template_pitch_short.pptx
+++ b/output/pptx/template_template_pitch_short.pptx
@@ -4714,7 +4714,7 @@
               </a:defRPr>
             </a:pPr>
             <a:r>
-              <a:t>•  One of 20 public exemplar templates in the same monorepo, each independently tested and coverage-gated.</a:t>
+              <a:t>•  One of 19 public exemplar templates in the same monorepo, each independently tested and coverage-gated.</a:t>
             </a:r>
           </a:p>
         </p:txBody>
@@ -5810,7 +5810,7 @@
               </a:defRPr>
             </a:pPr>
             <a:r>
-              <a:t>•  The pattern generalizes across the whole projects/templates/ folder — all 20 exemplars, not just one cherry-picked example — follow the identical thin-orchestrator, two-layer architecture.</a:t>
+              <a:t>•  The pattern generalizes across the whole projects/templates/ folder — all 19 exemplars, not just one cherry-picked example — follow the identical thin-orchestrator, two-layer architecture.</a:t>
             </a:r>
           </a:p>
         </p:txBody>

--- a/output/pptx/template_template_pitch_short.pptx
+++ b/output/pptx/template_template_pitch_short.pptx
@@ -4714,7 +4714,7 @@
               </a:defRPr>
             </a:pPr>
             <a:r>
-              <a:t>•  One of 19 public exemplar templates in the same monorepo, each independently tested and coverage-gated.</a:t>
+              <a:t>•  One of 23 public exemplar templates in the same monorepo, each independently tested and coverage-gated.</a:t>
             </a:r>
           </a:p>
         </p:txBody>
@@ -5810,7 +5810,7 @@
               </a:defRPr>
             </a:pPr>
             <a:r>
-              <a:t>•  The pattern generalizes across the whole projects/templates/ folder — all 19 exemplars, not just one cherry-picked example — follow the identical thin-orchestrator, two-layer architecture.</a:t>
+              <a:t>•  The pattern generalizes across the whole projects/templates/ folder — all 23 exemplars, not just one cherry-picked example — follow the identical thin-orchestrator, two-layer architecture.</a:t>
             </a:r>
           </a:p>
         </p:txBody>
